--- a/Energija.pptx
+++ b/Energija.pptx
@@ -138,7 +138,7 @@
               <c:strCache>
                 <c:ptCount val="1"/>
                 <c:pt idx="0">
-                  <c:v>Udeo</c:v>
+                  <c:v>Удео</c:v>
                 </c:pt>
               </c:strCache>
             </c:strRef>
@@ -396,22 +396,22 @@
               <c:strCache>
                 <c:ptCount val="6"/>
                 <c:pt idx="0">
-                  <c:v>Nafta</c:v>
+                  <c:v>Нафта</c:v>
                 </c:pt>
                 <c:pt idx="1">
-                  <c:v>Ugalj</c:v>
+                  <c:v>Угаљ</c:v>
                 </c:pt>
                 <c:pt idx="2">
-                  <c:v>Prirodni gas</c:v>
+                  <c:v>Природни гас</c:v>
                 </c:pt>
                 <c:pt idx="3">
-                  <c:v>Hidro</c:v>
+                  <c:v>Хидро</c:v>
                 </c:pt>
                 <c:pt idx="4">
-                  <c:v>Nuklearna</c:v>
+                  <c:v>Нуклеарна</c:v>
                 </c:pt>
                 <c:pt idx="5">
-                  <c:v>Vetar, sunce i ostalo</c:v>
+                  <c:v>Ветар, сунце и остало</c:v>
                 </c:pt>
               </c:strCache>
             </c:strRef>
@@ -509,7 +509,7 @@
               <c:strCache>
                 <c:ptCount val="1"/>
                 <c:pt idx="0">
-                  <c:v>EJ</c:v>
+                  <c:v>ЕЈ</c:v>
                 </c:pt>
               </c:strCache>
             </c:strRef>
@@ -927,25 +927,25 @@
                 <c:ptCount val="7"/>
                 <c:lvl>
                   <c:pt idx="0">
-                    <c:v>Kina</c:v>
+                    <c:v>Кина</c:v>
                   </c:pt>
                   <c:pt idx="1">
-                    <c:v>SAD</c:v>
+                    <c:v>САД</c:v>
                   </c:pt>
                   <c:pt idx="2">
-                    <c:v>Indija</c:v>
+                    <c:v>Индија</c:v>
                   </c:pt>
                   <c:pt idx="3">
-                    <c:v>Rusija</c:v>
+                    <c:v>Русија</c:v>
                   </c:pt>
                   <c:pt idx="4">
-                    <c:v>Japan</c:v>
+                    <c:v>Јапан</c:v>
                   </c:pt>
                   <c:pt idx="5">
-                    <c:v>Nemačka</c:v>
+                    <c:v>Немачка</c:v>
                   </c:pt>
                   <c:pt idx="6">
-                    <c:v>Ostatak sveta</c:v>
+                    <c:v>Остатак света</c:v>
                   </c:pt>
                 </c:lvl>
               </c:multiLvlStrCache>
@@ -1523,7 +1523,7 @@
           <a:p>
             <a:r>
               <a:rPr lang="en-US" dirty="0"/>
-              <a:t>Uvodni slajd. Pitanje za publiku: da li znate koliko energije potrošite za jedan dan?</a:t>
+              <a:t>Уводни слајд. Питање за публику: да ли знате колико енергије потрошите за један дан?</a:t>
             </a:r>
             <a:endParaRPr lang="en-US" dirty="0"/>
           </a:p>
@@ -1611,7 +1611,7 @@
           <a:p>
             <a:r>
               <a:rPr lang="en-US" dirty="0"/>
-              <a:t>Podaci EPS i Ministarstva energetike, približne vrednosti za 2023–2024.</a:t>
+              <a:t>Подаци ЕПС и Министарства енергетике, приближне вредности за 2023–2024.</a:t>
             </a:r>
             <a:endParaRPr lang="en-US" dirty="0"/>
           </a:p>
@@ -1699,7 +1699,7 @@
           <a:p>
             <a:r>
               <a:rPr lang="en-US" dirty="0"/>
-              <a:t>Diskusija: koji je izazov najveći za Srbiju?</a:t>
+              <a:t>Дискусија: који је изазов највећи за Србију?</a:t>
             </a:r>
             <a:endParaRPr lang="en-US" dirty="0"/>
           </a:p>
@@ -1787,7 +1787,7 @@
           <a:p>
             <a:r>
               <a:rPr lang="en-US" dirty="0"/>
-              <a:t>Naglasiti da su najjeftinija energija ona koju ne potrošimo.</a:t>
+              <a:t>Нагласити да су најјефтинија енергија она коју не потрошимо.</a:t>
             </a:r>
             <a:endParaRPr lang="en-US" dirty="0"/>
           </a:p>
@@ -1875,7 +1875,7 @@
           <a:p>
             <a:r>
               <a:rPr lang="en-US" dirty="0"/>
-              <a:t>Završiti pitanjem za publiku: šta ćete vi promeniti već sutra?</a:t>
+              <a:t>Завршити питањем за публику: шта ћете ви променити већ сутра?</a:t>
             </a:r>
             <a:endParaRPr lang="en-US" dirty="0"/>
           </a:p>
@@ -1963,7 +1963,7 @@
           <a:p>
             <a:r>
               <a:rPr lang="en-US" dirty="0"/>
-              <a:t>Definisati energiju i pokazati koliko je prisutna u svakodnevnom životu.</a:t>
+              <a:t>Дефинисати енергију и показати колико је присутна у свакодневном животу.</a:t>
             </a:r>
             <a:endParaRPr lang="en-US" dirty="0"/>
           </a:p>
@@ -2051,7 +2051,7 @@
           <a:p>
             <a:r>
               <a:rPr lang="en-US" dirty="0"/>
-              <a:t>Izvor: procene na osnovu Energy Institute Statistical Review i IEA. Vrednosti su zaokružene.</a:t>
+              <a:t>Извор: процене на основу Енергy Институте Статистицал Ревиеw и IEA. Вредности су заокружене.</a:t>
             </a:r>
             <a:endParaRPr lang="en-US" dirty="0"/>
           </a:p>
@@ -2139,7 +2139,7 @@
           <a:p>
             <a:r>
               <a:rPr lang="en-US" dirty="0"/>
-              <a:t>Neobnovljivi izvori: nastajali milionima godina, troše se brže nego što se obnavljaju.</a:t>
+              <a:t>Необновљиви извори: настајали милионима година, троше се брже него што се обнављају.</a:t>
             </a:r>
             <a:endParaRPr lang="en-US" dirty="0"/>
           </a:p>
@@ -2227,7 +2227,7 @@
           <a:p>
             <a:r>
               <a:rPr lang="en-US" dirty="0"/>
-              <a:t>Obnovljivi izvori rastu najbrže. Nedostatak: sunce i vetar nisu uvek dostupni — potrebno skladištenje.</a:t>
+              <a:t>Обновљиви извори расту најбрже. Недостатак: сунце и ветар нису увек доступни — потребно складиштење.</a:t>
             </a:r>
             <a:endParaRPr lang="en-US" dirty="0"/>
           </a:p>
@@ -2315,7 +2315,7 @@
           <a:p>
             <a:r>
               <a:rPr lang="en-US" dirty="0"/>
-              <a:t>Objasniti lanac: proizvodnja → prenos → distribucija → potrošnja.</a:t>
+              <a:t>Објаснити ланац: производња → пренос → дистрибуција → потрошња.</a:t>
             </a:r>
             <a:endParaRPr lang="en-US" dirty="0"/>
           </a:p>
@@ -2403,7 +2403,7 @@
           <a:p>
             <a:r>
               <a:rPr lang="en-US" dirty="0"/>
-              <a:t>Rast potrošnje prati rast stanovništva i ekonomije, naročito Azije.</a:t>
+              <a:t>Раст потрошње прати раст становништва и економије, нарочито Азије.</a:t>
             </a:r>
             <a:endParaRPr lang="en-US" dirty="0"/>
           </a:p>
@@ -2491,7 +2491,7 @@
           <a:p>
             <a:r>
               <a:rPr lang="en-US" dirty="0"/>
-              <a:t>Razlika između ukupne potrošnje i potrošnje po glavi stanovnika.</a:t>
+              <a:t>Разлика између укупне потрошње и потрошње по глави становника.</a:t>
             </a:r>
             <a:endParaRPr lang="en-US" dirty="0"/>
           </a:p>
@@ -2579,7 +2579,7 @@
           <a:p>
             <a:r>
               <a:rPr lang="en-US" dirty="0"/>
-              <a:t>Podaci IEA, zaokruženo. Napomena: ovo je finalna potrošnja, ne primarna.</a:t>
+              <a:t>Подаци IEA, заокружено. Напомена: ово је финална потрошња, не примарна.</a:t>
             </a:r>
             <a:endParaRPr lang="en-US" dirty="0"/>
           </a:p>
@@ -3021,7 +3021,7 @@
                 <a:ea typeface="Calibri" pitchFamily="34" charset="-122"/>
                 <a:cs typeface="Calibri" pitchFamily="34" charset="-120"/>
               </a:rPr>
-              <a:t>PROIZVODNJA I POTROŠNJA</a:t>
+              <a:t>ПРОИЗВОДЊА И ПОТРОШЊА</a:t>
             </a:r>
             <a:endParaRPr lang="en-US" sz="1800" dirty="0"/>
           </a:p>
@@ -3060,7 +3060,7 @@
                 <a:ea typeface="Cambria" pitchFamily="34" charset="-122"/>
                 <a:cs typeface="Cambria" pitchFamily="34" charset="-120"/>
               </a:rPr>
-              <a:t>ENERGIJE</a:t>
+              <a:t>ЕНЕРГИЈЕ</a:t>
             </a:r>
             <a:endParaRPr lang="en-US" sz="7200" dirty="0"/>
           </a:p>
@@ -3099,7 +3099,7 @@
                 <a:ea typeface="Calibri" pitchFamily="34" charset="-122"/>
                 <a:cs typeface="Calibri" pitchFamily="34" charset="-120"/>
               </a:rPr>
-              <a:t>Odakle dolazi energija koju koristimo svakog dana — i kuda ona odlazi?</a:t>
+              <a:t>Одакле долази енергија коју користимо сваког дана — и куда она одлази?</a:t>
             </a:r>
             <a:endParaRPr lang="en-US" sz="1800" dirty="0"/>
           </a:p>
@@ -3138,7 +3138,7 @@
                 <a:ea typeface="Calibri" pitchFamily="34" charset="-122"/>
                 <a:cs typeface="Calibri" pitchFamily="34" charset="-120"/>
               </a:rPr>
-              <a:t>Prezentacija  •  2026</a:t>
+              <a:t>Презентација  •  2026</a:t>
             </a:r>
             <a:endParaRPr lang="en-US" sz="1200" dirty="0"/>
           </a:p>
@@ -3209,7 +3209,7 @@
                 <a:ea typeface="Cambria" pitchFamily="34" charset="-122"/>
                 <a:cs typeface="Cambria" pitchFamily="34" charset="-120"/>
               </a:rPr>
-              <a:t>Energija u Srbiji</a:t>
+              <a:t>Енергија у Србији</a:t>
             </a:r>
             <a:endParaRPr lang="en-US" sz="3200" dirty="0"/>
           </a:p>
@@ -3272,7 +3272,7 @@
                 <a:ea typeface="Calibri" pitchFamily="34" charset="-122"/>
                 <a:cs typeface="Calibri" pitchFamily="34" charset="-120"/>
               </a:rPr>
-              <a:t>Đerdap na Dunavu — najveća hidroelektrana u Srbiji</a:t>
+              <a:t>Ђердап на Дунаву — највећа хидроелектрана у Србији</a:t>
             </a:r>
             <a:endParaRPr lang="en-US" sz="1000" dirty="0"/>
           </a:p>
@@ -3384,7 +3384,7 @@
                 <a:ea typeface="Calibri" pitchFamily="34" charset="-122"/>
                 <a:cs typeface="Calibri" pitchFamily="34" charset="-120"/>
               </a:rPr>
-              <a:t>struje dolazi iz uglja (lignita) — TE Nikola Tesla, Kostolac</a:t>
+              <a:t>струје долази из угља (лигнита) — ТЕ Никола Тесла, Костолац</a:t>
             </a:r>
             <a:endParaRPr lang="en-US" sz="1050" dirty="0"/>
           </a:p>
@@ -3496,7 +3496,7 @@
                 <a:ea typeface="Calibri" pitchFamily="34" charset="-122"/>
                 <a:cs typeface="Calibri" pitchFamily="34" charset="-120"/>
               </a:rPr>
-              <a:t>iz hidroelektrana — Đerdap, Bajina Bašta</a:t>
+              <a:t>из хидроелектрана — Ђердап, Бајина Башта</a:t>
             </a:r>
             <a:endParaRPr lang="en-US" sz="1050" dirty="0"/>
           </a:p>
@@ -3608,7 +3608,7 @@
                 <a:ea typeface="Calibri" pitchFamily="34" charset="-122"/>
                 <a:cs typeface="Calibri" pitchFamily="34" charset="-120"/>
               </a:rPr>
-              <a:t>iz vetra, sunca i biomase — ali brzo raste</a:t>
+              <a:t>из ветра, сунца и биомасе — али брзо расте</a:t>
             </a:r>
             <a:endParaRPr lang="en-US" sz="1050" dirty="0"/>
           </a:p>
@@ -3720,7 +3720,7 @@
                 <a:ea typeface="Calibri" pitchFamily="34" charset="-122"/>
                 <a:cs typeface="Calibri" pitchFamily="34" charset="-120"/>
               </a:rPr>
-              <a:t>gasa i većina nafte se uvozi</a:t>
+              <a:t>гаса и већина нафте се увози</a:t>
             </a:r>
             <a:endParaRPr lang="en-US" sz="1050" dirty="0"/>
           </a:p>
@@ -3759,7 +3759,7 @@
                 <a:ea typeface="Calibri" pitchFamily="34" charset="-122"/>
                 <a:cs typeface="Calibri" pitchFamily="34" charset="-120"/>
               </a:rPr>
-              <a:t>Srbija troši oko 2× više energije po jedinici BDP-a od proseka EU — velika prilika za uštedu.</a:t>
+              <a:t>Србија троши око 2× више енергије по јединици БДП-а од просека ЕУ — велика прилика за уштеду.</a:t>
             </a:r>
             <a:endParaRPr lang="en-US" sz="1150" dirty="0"/>
           </a:p>
@@ -3905,7 +3905,7 @@
                 <a:ea typeface="Cambria" pitchFamily="34" charset="-122"/>
                 <a:cs typeface="Cambria" pitchFamily="34" charset="-120"/>
               </a:rPr>
-              <a:t>Najveći izazovi</a:t>
+              <a:t>Највећи изазови</a:t>
             </a:r>
             <a:endParaRPr lang="en-US" sz="3200" dirty="0"/>
           </a:p>
@@ -4027,7 +4027,7 @@
                 <a:ea typeface="Calibri" pitchFamily="34" charset="-122"/>
                 <a:cs typeface="Calibri" pitchFamily="34" charset="-120"/>
               </a:rPr>
-              <a:t>Klimatske promene</a:t>
+              <a:t>Климатске промене</a:t>
             </a:r>
             <a:endParaRPr lang="en-US" sz="1500" dirty="0"/>
           </a:p>
@@ -4066,7 +4066,7 @@
                 <a:ea typeface="Calibri" pitchFamily="34" charset="-122"/>
                 <a:cs typeface="Calibri" pitchFamily="34" charset="-120"/>
               </a:rPr>
-              <a:t>Energetika pravi ¾ svetskih emisija gasova staklene bašte.</a:t>
+              <a:t>Енергетика прави ¾ светских емисија гасова стаклене баште.</a:t>
             </a:r>
             <a:endParaRPr lang="en-US" sz="1150" dirty="0"/>
           </a:p>
@@ -4188,7 +4188,7 @@
                 <a:ea typeface="Calibri" pitchFamily="34" charset="-122"/>
                 <a:cs typeface="Calibri" pitchFamily="34" charset="-120"/>
               </a:rPr>
-              <a:t>Zavisnost i sigurnost</a:t>
+              <a:t>Зависност и сигурност</a:t>
             </a:r>
             <a:endParaRPr lang="en-US" sz="1500" dirty="0"/>
           </a:p>
@@ -4227,7 +4227,7 @@
                 <a:ea typeface="Calibri" pitchFamily="34" charset="-122"/>
                 <a:cs typeface="Calibri" pitchFamily="34" charset="-120"/>
               </a:rPr>
-              <a:t>Ratovi i krize dižu cene gasa i nafte preko noći.</a:t>
+              <a:t>Ратови и кризе дижу цене гаса и нафте преко ноћи.</a:t>
             </a:r>
             <a:endParaRPr lang="en-US" sz="1150" dirty="0"/>
           </a:p>
@@ -4349,7 +4349,7 @@
                 <a:ea typeface="Calibri" pitchFamily="34" charset="-122"/>
                 <a:cs typeface="Calibri" pitchFamily="34" charset="-120"/>
               </a:rPr>
-              <a:t>Rastuća potražnja</a:t>
+              <a:t>Растућа потражња</a:t>
             </a:r>
             <a:endParaRPr lang="en-US" sz="1500" dirty="0"/>
           </a:p>
@@ -4388,7 +4388,7 @@
                 <a:ea typeface="Calibri" pitchFamily="34" charset="-122"/>
                 <a:cs typeface="Calibri" pitchFamily="34" charset="-120"/>
               </a:rPr>
-              <a:t>Klima-uređaji, električni automobili i AI data centri traže sve više struje.</a:t>
+              <a:t>Клима-уређаји, електрични аутомобили и AI дата центри траже све више струје.</a:t>
             </a:r>
             <a:endParaRPr lang="en-US" sz="1150" dirty="0"/>
           </a:p>
@@ -4510,7 +4510,7 @@
                 <a:ea typeface="Calibri" pitchFamily="34" charset="-122"/>
                 <a:cs typeface="Calibri" pitchFamily="34" charset="-120"/>
               </a:rPr>
-              <a:t>Skladištenje</a:t>
+              <a:t>Складиштење</a:t>
             </a:r>
             <a:endParaRPr lang="en-US" sz="1500" dirty="0"/>
           </a:p>
@@ -4549,7 +4549,7 @@
                 <a:ea typeface="Calibri" pitchFamily="34" charset="-122"/>
                 <a:cs typeface="Calibri" pitchFamily="34" charset="-120"/>
               </a:rPr>
-              <a:t>Sunce i vetar ne rade uvek — potrebne su baterije i pametne mreže.</a:t>
+              <a:t>Сунце и ветар не раде увек — потребне су батерије и паметне мреже.</a:t>
             </a:r>
             <a:endParaRPr lang="en-US" sz="1150" dirty="0"/>
           </a:p>
@@ -4659,7 +4659,7 @@
                 <a:ea typeface="Cambria" pitchFamily="34" charset="-122"/>
                 <a:cs typeface="Cambria" pitchFamily="34" charset="-120"/>
               </a:rPr>
-              <a:t>Šta možemo da uradimo?</a:t>
+              <a:t>Шта можемо да урадимо?</a:t>
             </a:r>
             <a:endParaRPr lang="en-US" sz="3200" dirty="0"/>
           </a:p>
@@ -4698,7 +4698,7 @@
                 <a:ea typeface="Calibri" pitchFamily="34" charset="-122"/>
                 <a:cs typeface="Calibri" pitchFamily="34" charset="-120"/>
               </a:rPr>
-              <a:t>Energetska tranzicija — velike odluke i mali koraci</a:t>
+              <a:t>Енергетска транзиција — велике одлуке и мали кораци</a:t>
             </a:r>
             <a:endParaRPr lang="en-US" sz="1300" dirty="0"/>
           </a:p>
@@ -4820,7 +4820,7 @@
                 <a:ea typeface="Calibri" pitchFamily="34" charset="-122"/>
                 <a:cs typeface="Calibri" pitchFamily="34" charset="-120"/>
               </a:rPr>
-              <a:t>Na nivou države</a:t>
+              <a:t>На нивоу државе</a:t>
             </a:r>
             <a:endParaRPr lang="en-US" sz="1600" dirty="0"/>
           </a:p>
@@ -4863,7 +4863,7 @@
                 <a:ea typeface="Calibri" pitchFamily="34" charset="-122"/>
                 <a:cs typeface="Calibri" pitchFamily="34" charset="-120"/>
               </a:rPr>
-              <a:t>Ulaganje u solarne i vetro elektrane</a:t>
+              <a:t>Улагање у соларне и ветро електране</a:t>
             </a:r>
             <a:endParaRPr lang="en-US" sz="1250" dirty="0"/>
           </a:p>
@@ -4884,7 +4884,7 @@
                 <a:ea typeface="Calibri" pitchFamily="34" charset="-122"/>
                 <a:cs typeface="Calibri" pitchFamily="34" charset="-120"/>
               </a:rPr>
-              <a:t>Modernizacija mreže i smanjenje gubitaka</a:t>
+              <a:t>Модернизација мреже и смањење губитака</a:t>
             </a:r>
             <a:endParaRPr lang="en-US" sz="1250" dirty="0"/>
           </a:p>
@@ -4905,7 +4905,7 @@
                 <a:ea typeface="Calibri" pitchFamily="34" charset="-122"/>
                 <a:cs typeface="Calibri" pitchFamily="34" charset="-120"/>
               </a:rPr>
-              <a:t>Postepeno gašenje starih termoelektrana</a:t>
+              <a:t>Постепено гашење старих термоелектрана</a:t>
             </a:r>
             <a:endParaRPr lang="en-US" sz="1250" dirty="0"/>
           </a:p>
@@ -4926,7 +4926,7 @@
                 <a:ea typeface="Calibri" pitchFamily="34" charset="-122"/>
                 <a:cs typeface="Calibri" pitchFamily="34" charset="-120"/>
               </a:rPr>
-              <a:t>Podsticaji za izolaciju zgrada i toplotne pumpe</a:t>
+              <a:t>Подстицаји за изолацију зграда и топлотне пумпе</a:t>
             </a:r>
             <a:endParaRPr lang="en-US" sz="1250" dirty="0"/>
           </a:p>
@@ -5048,7 +5048,7 @@
                 <a:ea typeface="Calibri" pitchFamily="34" charset="-122"/>
                 <a:cs typeface="Calibri" pitchFamily="34" charset="-120"/>
               </a:rPr>
-              <a:t>Kod kuće — već danas</a:t>
+              <a:t>Код куће — већ данас</a:t>
             </a:r>
             <a:endParaRPr lang="en-US" sz="1600" dirty="0"/>
           </a:p>
@@ -5091,7 +5091,7 @@
                 <a:ea typeface="Calibri" pitchFamily="34" charset="-122"/>
                 <a:cs typeface="Calibri" pitchFamily="34" charset="-120"/>
               </a:rPr>
-              <a:t>LED sijalice troše 80% manje od običnih</a:t>
+              <a:t>ЛЕД сијалице троше 80% мање од обичних</a:t>
             </a:r>
             <a:endParaRPr lang="en-US" sz="1250" dirty="0"/>
           </a:p>
@@ -5112,7 +5112,7 @@
                 <a:ea typeface="Calibri" pitchFamily="34" charset="-122"/>
                 <a:cs typeface="Calibri" pitchFamily="34" charset="-120"/>
               </a:rPr>
-              <a:t>Isključi uređaje iz „stand-by“ režima — do 10% računa</a:t>
+              <a:t>Искључи уређаје из „стенд-бај“ режима — до 10% рачуна</a:t>
             </a:r>
             <a:endParaRPr lang="en-US" sz="1250" dirty="0"/>
           </a:p>
@@ -5133,7 +5133,7 @@
                 <a:ea typeface="Calibri" pitchFamily="34" charset="-122"/>
                 <a:cs typeface="Calibri" pitchFamily="34" charset="-120"/>
               </a:rPr>
-              <a:t>Termostat niži za 1°C = 6% manje energije za grejanje</a:t>
+              <a:t>Термостат нижи за 1°C = 6% мање енергије за грејање</a:t>
             </a:r>
             <a:endParaRPr lang="en-US" sz="1250" dirty="0"/>
           </a:p>
@@ -5154,7 +5154,7 @@
                 <a:ea typeface="Calibri" pitchFamily="34" charset="-122"/>
                 <a:cs typeface="Calibri" pitchFamily="34" charset="-120"/>
               </a:rPr>
-              <a:t>Pešačenje, bicikl i javni prevoz umesto auta</a:t>
+              <a:t>Пешачење, бицикл и јавни превоз уместо аута</a:t>
             </a:r>
             <a:endParaRPr lang="en-US" sz="1250" dirty="0"/>
           </a:p>
@@ -5300,7 +5300,7 @@
                 <a:ea typeface="Calibri" pitchFamily="34" charset="-122"/>
                 <a:cs typeface="Calibri" pitchFamily="34" charset="-120"/>
               </a:rPr>
-              <a:t>ZAKLJUČAK</a:t>
+              <a:t>ЗАКЉУЧАК</a:t>
             </a:r>
             <a:endParaRPr lang="en-US" sz="1600" dirty="0"/>
           </a:p>
@@ -5339,7 +5339,7 @@
                 <a:ea typeface="Cambria" pitchFamily="34" charset="-122"/>
                 <a:cs typeface="Cambria" pitchFamily="34" charset="-120"/>
               </a:rPr>
-              <a:t>Energija pokreće svet — a način na koji je proizvodimo i trošimo odlučuje kakav će taj svet biti.</a:t>
+              <a:t>Енергија покреће свет — а начин на који је производимо и трошимо одлучује какав ће тај свет бити.</a:t>
             </a:r>
             <a:endParaRPr lang="en-US" sz="2800" dirty="0"/>
           </a:p>
@@ -5427,7 +5427,7 @@
                 <a:ea typeface="Calibri" pitchFamily="34" charset="-122"/>
                 <a:cs typeface="Calibri" pitchFamily="34" charset="-120"/>
               </a:rPr>
-              <a:t>80% energije još dolazi iz fosilnih goriva</a:t>
+              <a:t>80% енергије још долази из фосилних горива</a:t>
             </a:r>
             <a:endParaRPr lang="en-US" sz="1500" dirty="0"/>
           </a:p>
@@ -5515,7 +5515,7 @@
                 <a:ea typeface="Calibri" pitchFamily="34" charset="-122"/>
                 <a:cs typeface="Calibri" pitchFamily="34" charset="-120"/>
               </a:rPr>
-              <a:t>Potrošnja raste — svet, Azija, data centri</a:t>
+              <a:t>Потрошња расте — свет, Азија, дата центри</a:t>
             </a:r>
             <a:endParaRPr lang="en-US" sz="1500" dirty="0"/>
           </a:p>
@@ -5603,7 +5603,7 @@
                 <a:ea typeface="Calibri" pitchFamily="34" charset="-122"/>
                 <a:cs typeface="Calibri" pitchFamily="34" charset="-120"/>
               </a:rPr>
-              <a:t>Obnovljivi izvori su najbrže rastući i najjeftiniji</a:t>
+              <a:t>Обновљиви извори су најбрже растући и најјефтинији</a:t>
             </a:r>
             <a:endParaRPr lang="en-US" sz="1500" dirty="0"/>
           </a:p>
@@ -5691,7 +5691,7 @@
                 <a:ea typeface="Calibri" pitchFamily="34" charset="-122"/>
                 <a:cs typeface="Calibri" pitchFamily="34" charset="-120"/>
               </a:rPr>
-              <a:t>Najjeftinija energija je ona koju ne potrošimo</a:t>
+              <a:t>Најјефтинија енергија је она коју не потрошимо</a:t>
             </a:r>
             <a:endParaRPr lang="en-US" sz="1500" dirty="0"/>
           </a:p>
@@ -5730,7 +5730,7 @@
                 <a:ea typeface="Calibri" pitchFamily="34" charset="-122"/>
                 <a:cs typeface="Calibri" pitchFamily="34" charset="-120"/>
               </a:rPr>
-              <a:t>Hvala na pažnji!  •  Pitanja?</a:t>
+              <a:t>Хвала на пажњи!  •  Питања?</a:t>
             </a:r>
             <a:endParaRPr lang="en-US" sz="1400" dirty="0"/>
           </a:p>
@@ -5801,7 +5801,7 @@
                 <a:ea typeface="Cambria" pitchFamily="34" charset="-122"/>
                 <a:cs typeface="Cambria" pitchFamily="34" charset="-120"/>
               </a:rPr>
-              <a:t>Šta je energija i zašto je važna?</a:t>
+              <a:t>Шта је енергија?</a:t>
             </a:r>
             <a:endParaRPr lang="en-US" sz="3200" dirty="0"/>
           </a:p>
@@ -5840,7 +5840,7 @@
                 <a:ea typeface="Calibri" pitchFamily="34" charset="-122"/>
                 <a:cs typeface="Calibri" pitchFamily="34" charset="-120"/>
               </a:rPr>
-              <a:t>Energija je sposobnost da se obavi rad. Bez nje nema svetla, toplote, saobraćaja ni interneta. Sve što nas okružuje pokreće neki oblik energije.</a:t>
+              <a:t>Енергија је способност да се обави рад. Без ње нема светла, топлоте, саобраћаја ни интернета. Све што нас окружује покреће неки облик енергије.</a:t>
             </a:r>
             <a:endParaRPr lang="en-US" sz="1500" dirty="0"/>
           </a:p>
@@ -5928,7 +5928,7 @@
                 <a:ea typeface="Calibri" pitchFamily="34" charset="-122"/>
                 <a:cs typeface="Calibri" pitchFamily="34" charset="-120"/>
               </a:rPr>
-              <a:t>Svetlost i toplota</a:t>
+              <a:t>Светлост и топлота</a:t>
             </a:r>
             <a:endParaRPr lang="en-US" sz="1400" dirty="0"/>
           </a:p>
@@ -5945,7 +5945,7 @@
                 <a:ea typeface="Calibri" pitchFamily="34" charset="-122"/>
                 <a:cs typeface="Calibri" pitchFamily="34" charset="-120"/>
               </a:rPr>
-              <a:t>Osvetljenje, grejanje i hlađenje naših domova</a:t>
+              <a:t>Осветљење, грејање и хлађење наших домова</a:t>
             </a:r>
             <a:endParaRPr lang="en-US" sz="1400" dirty="0"/>
           </a:p>
@@ -6033,7 +6033,7 @@
                 <a:ea typeface="Calibri" pitchFamily="34" charset="-122"/>
                 <a:cs typeface="Calibri" pitchFamily="34" charset="-120"/>
               </a:rPr>
-              <a:t>Kretanje</a:t>
+              <a:t>Кретање</a:t>
             </a:r>
             <a:endParaRPr lang="en-US" sz="1400" dirty="0"/>
           </a:p>
@@ -6050,7 +6050,7 @@
                 <a:ea typeface="Calibri" pitchFamily="34" charset="-122"/>
                 <a:cs typeface="Calibri" pitchFamily="34" charset="-120"/>
               </a:rPr>
-              <a:t>Automobili, vozovi, avioni i brodovi</a:t>
+              <a:t>Аутомобили, возови, авиони и бродови</a:t>
             </a:r>
             <a:endParaRPr lang="en-US" sz="1400" dirty="0"/>
           </a:p>
@@ -6138,7 +6138,7 @@
                 <a:ea typeface="Calibri" pitchFamily="34" charset="-122"/>
                 <a:cs typeface="Calibri" pitchFamily="34" charset="-120"/>
               </a:rPr>
-              <a:t>Proizvodnja</a:t>
+              <a:t>Производња</a:t>
             </a:r>
             <a:endParaRPr lang="en-US" sz="1400" dirty="0"/>
           </a:p>
@@ -6155,7 +6155,7 @@
                 <a:ea typeface="Calibri" pitchFamily="34" charset="-122"/>
                 <a:cs typeface="Calibri" pitchFamily="34" charset="-120"/>
               </a:rPr>
-              <a:t>Fabrike, hrana, odeća, građevinarstvo</a:t>
+              <a:t>Фабрике, храна, одећа, грађевинарство</a:t>
             </a:r>
             <a:endParaRPr lang="en-US" sz="1400" dirty="0"/>
           </a:p>
@@ -6243,7 +6243,7 @@
                 <a:ea typeface="Calibri" pitchFamily="34" charset="-122"/>
                 <a:cs typeface="Calibri" pitchFamily="34" charset="-120"/>
               </a:rPr>
-              <a:t>Komunikacija</a:t>
+              <a:t>Комуникација</a:t>
             </a:r>
             <a:endParaRPr lang="en-US" sz="1400" dirty="0"/>
           </a:p>
@@ -6260,7 +6260,7 @@
                 <a:ea typeface="Calibri" pitchFamily="34" charset="-122"/>
                 <a:cs typeface="Calibri" pitchFamily="34" charset="-120"/>
               </a:rPr>
-              <a:t>Telefoni, računari, internet, data centri</a:t>
+              <a:t>Телефони, рачунари, интернет, дата центри</a:t>
             </a:r>
             <a:endParaRPr lang="en-US" sz="1400" dirty="0"/>
           </a:p>
@@ -6394,7 +6394,7 @@
                 <a:ea typeface="Cambria" pitchFamily="34" charset="-122"/>
                 <a:cs typeface="Cambria" pitchFamily="34" charset="-120"/>
               </a:rPr>
-              <a:t>Odakle svet dobija energiju?</a:t>
+              <a:t>Одакле свет добија енергију?</a:t>
             </a:r>
             <a:endParaRPr lang="en-US" sz="3200" dirty="0"/>
           </a:p>
@@ -6433,7 +6433,7 @@
                 <a:ea typeface="Calibri" pitchFamily="34" charset="-122"/>
                 <a:cs typeface="Calibri" pitchFamily="34" charset="-120"/>
               </a:rPr>
-              <a:t>Udeo izvora u svetskoj primarnoj energiji (2023, približno)</a:t>
+              <a:t>Удео извора у светској примарној енергији (2023, приближно)</a:t>
             </a:r>
             <a:endParaRPr lang="en-US" sz="1300" dirty="0"/>
           </a:p>
@@ -6561,7 +6561,7 @@
                 <a:ea typeface="Calibri" pitchFamily="34" charset="-122"/>
                 <a:cs typeface="Calibri" pitchFamily="34" charset="-120"/>
               </a:rPr>
-              <a:t>svetske energije i dalje dolazi iz fosilnih goriva — nafte, uglja i gasa.</a:t>
+              <a:t>светске енергије и даље долази из фосилних горива — нафте, угља и гаса.</a:t>
             </a:r>
             <a:endParaRPr lang="en-US" sz="1200" dirty="0"/>
           </a:p>
@@ -6673,7 +6673,7 @@
                 <a:ea typeface="Calibri" pitchFamily="34" charset="-122"/>
                 <a:cs typeface="Calibri" pitchFamily="34" charset="-120"/>
               </a:rPr>
-              <a:t>toliko su porasle solarna i vetro energija u poslednjih 10 godina — najbrže rastući izvori.</a:t>
+              <a:t>толико су порасле соларна и ветро енергија у последњих 10 година — најбрже растући извори.</a:t>
             </a:r>
             <a:endParaRPr lang="en-US" sz="1200" dirty="0"/>
           </a:p>
@@ -6783,7 +6783,7 @@
                 <a:ea typeface="Cambria" pitchFamily="34" charset="-122"/>
                 <a:cs typeface="Cambria" pitchFamily="34" charset="-120"/>
               </a:rPr>
-              <a:t>Neobnovljivi izvori energije</a:t>
+              <a:t>Необновљиви извори енергије</a:t>
             </a:r>
             <a:endParaRPr lang="en-US" sz="3200" dirty="0"/>
           </a:p>
@@ -6846,7 +6846,7 @@
                 <a:ea typeface="Calibri" pitchFamily="34" charset="-122"/>
                 <a:cs typeface="Calibri" pitchFamily="34" charset="-120"/>
               </a:rPr>
-              <a:t>Termoelektrana na ugalj — i dalje najveći izvor struje u svetu</a:t>
+              <a:t>Термоелектрана на угаљ — и даље највећи извор струје у свету</a:t>
             </a:r>
             <a:endParaRPr lang="en-US" sz="1000" dirty="0"/>
           </a:p>
@@ -6968,7 +6968,7 @@
                 <a:ea typeface="Calibri" pitchFamily="34" charset="-122"/>
                 <a:cs typeface="Calibri" pitchFamily="34" charset="-120"/>
               </a:rPr>
-              <a:t>Ugalj</a:t>
+              <a:t>Угаљ</a:t>
             </a:r>
             <a:endParaRPr lang="en-US" sz="1300" dirty="0"/>
           </a:p>
@@ -6985,7 +6985,7 @@
                 <a:ea typeface="Calibri" pitchFamily="34" charset="-122"/>
                 <a:cs typeface="Calibri" pitchFamily="34" charset="-120"/>
               </a:rPr>
-              <a:t>Najprljaviji izvor, ali jeftin i dostupan. Glavni izvor struje u Kini, Indiji i Srbiji.</a:t>
+              <a:t>Најпрљавији извор, али јефтин и доступан. Главни извор струје у Кини, Индији и Србији.</a:t>
             </a:r>
             <a:endParaRPr lang="en-US" sz="1300" dirty="0"/>
           </a:p>
@@ -7107,7 +7107,7 @@
                 <a:ea typeface="Calibri" pitchFamily="34" charset="-122"/>
                 <a:cs typeface="Calibri" pitchFamily="34" charset="-120"/>
               </a:rPr>
-              <a:t>Nafta</a:t>
+              <a:t>Нафта</a:t>
             </a:r>
             <a:endParaRPr lang="en-US" sz="1300" dirty="0"/>
           </a:p>
@@ -7124,7 +7124,7 @@
                 <a:ea typeface="Calibri" pitchFamily="34" charset="-122"/>
                 <a:cs typeface="Calibri" pitchFamily="34" charset="-120"/>
               </a:rPr>
-              <a:t>Pokreće skoro sav saobraćaj. Rezerve su ograničene, a cena zavisi od politike.</a:t>
+              <a:t>Покреће скоро сав саобраћај. Резерве су ограничене, а цена зависи од политике.</a:t>
             </a:r>
             <a:endParaRPr lang="en-US" sz="1300" dirty="0"/>
           </a:p>
@@ -7246,7 +7246,7 @@
                 <a:ea typeface="Calibri" pitchFamily="34" charset="-122"/>
                 <a:cs typeface="Calibri" pitchFamily="34" charset="-120"/>
               </a:rPr>
-              <a:t>Prirodni gas</a:t>
+              <a:t>Природни гас</a:t>
             </a:r>
             <a:endParaRPr lang="en-US" sz="1300" dirty="0"/>
           </a:p>
@@ -7263,7 +7263,7 @@
                 <a:ea typeface="Calibri" pitchFamily="34" charset="-122"/>
                 <a:cs typeface="Calibri" pitchFamily="34" charset="-120"/>
               </a:rPr>
-              <a:t>Čistiji od uglja, koristi se za grejanje i struju. Zavisnost od uvoza je rizik.</a:t>
+              <a:t>Чистији од угља, користи се за грејање и струју. Зависност од увоза је ризик.</a:t>
             </a:r>
             <a:endParaRPr lang="en-US" sz="1300" dirty="0"/>
           </a:p>
@@ -7385,7 +7385,7 @@
                 <a:ea typeface="Calibri" pitchFamily="34" charset="-122"/>
                 <a:cs typeface="Calibri" pitchFamily="34" charset="-120"/>
               </a:rPr>
-              <a:t>Nuklearna energija</a:t>
+              <a:t>Нуклеарна енергија</a:t>
             </a:r>
             <a:endParaRPr lang="en-US" sz="1300" dirty="0"/>
           </a:p>
@@ -7402,7 +7402,7 @@
                 <a:ea typeface="Calibri" pitchFamily="34" charset="-122"/>
                 <a:cs typeface="Calibri" pitchFamily="34" charset="-120"/>
               </a:rPr>
-              <a:t>Ogromna snaga bez CO₂, ali skupa izgradnja i pitanje otpada.</a:t>
+              <a:t>Огромна снага без CO₂, али скупа изградња и питање отпада.</a:t>
             </a:r>
             <a:endParaRPr lang="en-US" sz="1300" dirty="0"/>
           </a:p>
@@ -7512,7 +7512,7 @@
                 <a:ea typeface="Cambria" pitchFamily="34" charset="-122"/>
                 <a:cs typeface="Cambria" pitchFamily="34" charset="-120"/>
               </a:rPr>
-              <a:t>Obnovljivi izvori energije</a:t>
+              <a:t>Обновљиви извори енергије</a:t>
             </a:r>
             <a:endParaRPr lang="en-US" sz="3200" dirty="0"/>
           </a:p>
@@ -7634,7 +7634,7 @@
                 <a:ea typeface="Calibri" pitchFamily="34" charset="-122"/>
                 <a:cs typeface="Calibri" pitchFamily="34" charset="-120"/>
               </a:rPr>
-              <a:t>Sunce</a:t>
+              <a:t>Сунце</a:t>
             </a:r>
             <a:endParaRPr lang="en-US" sz="1300" dirty="0"/>
           </a:p>
@@ -7673,7 +7673,7 @@
                 <a:ea typeface="Calibri" pitchFamily="34" charset="-122"/>
                 <a:cs typeface="Calibri" pitchFamily="34" charset="-120"/>
               </a:rPr>
-              <a:t>Solarni paneli — najjeftinija nova struja na svetu</a:t>
+              <a:t>Соларни панели — најјефтинија нова струја на свету</a:t>
             </a:r>
             <a:endParaRPr lang="en-US" sz="1000" dirty="0"/>
           </a:p>
@@ -7795,7 +7795,7 @@
                 <a:ea typeface="Calibri" pitchFamily="34" charset="-122"/>
                 <a:cs typeface="Calibri" pitchFamily="34" charset="-120"/>
               </a:rPr>
-              <a:t>Vetar</a:t>
+              <a:t>Ветар</a:t>
             </a:r>
             <a:endParaRPr lang="en-US" sz="1300" dirty="0"/>
           </a:p>
@@ -7834,7 +7834,7 @@
                 <a:ea typeface="Calibri" pitchFamily="34" charset="-122"/>
                 <a:cs typeface="Calibri" pitchFamily="34" charset="-120"/>
               </a:rPr>
-              <a:t>Vetroparkovi na kopnu i na moru</a:t>
+              <a:t>Ветропаркови на копну и на мору</a:t>
             </a:r>
             <a:endParaRPr lang="en-US" sz="1000" dirty="0"/>
           </a:p>
@@ -7956,7 +7956,7 @@
                 <a:ea typeface="Calibri" pitchFamily="34" charset="-122"/>
                 <a:cs typeface="Calibri" pitchFamily="34" charset="-120"/>
               </a:rPr>
-              <a:t>Voda</a:t>
+              <a:t>Вода</a:t>
             </a:r>
             <a:endParaRPr lang="en-US" sz="1300" dirty="0"/>
           </a:p>
@@ -7995,7 +7995,7 @@
                 <a:ea typeface="Calibri" pitchFamily="34" charset="-122"/>
                 <a:cs typeface="Calibri" pitchFamily="34" charset="-120"/>
               </a:rPr>
-              <a:t>Hidroelektrane — najstariji obnovljivi izvor</a:t>
+              <a:t>Хидроелектране — најстарији обновљиви извор</a:t>
             </a:r>
             <a:endParaRPr lang="en-US" sz="1000" dirty="0"/>
           </a:p>
@@ -8117,7 +8117,7 @@
                 <a:ea typeface="Calibri" pitchFamily="34" charset="-122"/>
                 <a:cs typeface="Calibri" pitchFamily="34" charset="-120"/>
               </a:rPr>
-              <a:t>Biomasa</a:t>
+              <a:t>Биомаса</a:t>
             </a:r>
             <a:endParaRPr lang="en-US" sz="1300" dirty="0"/>
           </a:p>
@@ -8156,7 +8156,7 @@
                 <a:ea typeface="Calibri" pitchFamily="34" charset="-122"/>
                 <a:cs typeface="Calibri" pitchFamily="34" charset="-120"/>
               </a:rPr>
-              <a:t>Drvo, otpad i geotermalna toplota iz Zemlje</a:t>
+              <a:t>Дрво, отпад и геотермална топлота из Земље</a:t>
             </a:r>
             <a:endParaRPr lang="en-US" sz="1000" dirty="0"/>
           </a:p>
@@ -8219,7 +8219,7 @@
                 <a:ea typeface="Calibri" pitchFamily="34" charset="-122"/>
                 <a:cs typeface="Calibri" pitchFamily="34" charset="-120"/>
               </a:rPr>
-              <a:t>Obnavljaju se prirodno i ne zagađuju vazduh tokom rada.</a:t>
+              <a:t>Обнављају се природно и не загађују ваздух током рада.</a:t>
             </a:r>
             <a:endParaRPr lang="en-US" sz="1100" dirty="0"/>
           </a:p>
@@ -8329,7 +8329,7 @@
                 <a:ea typeface="Cambria" pitchFamily="34" charset="-122"/>
                 <a:cs typeface="Cambria" pitchFamily="34" charset="-120"/>
               </a:rPr>
-              <a:t>Put energije: od izvora do utičnice</a:t>
+              <a:t>Пут енергије до утичнице</a:t>
             </a:r>
             <a:endParaRPr lang="en-US" sz="3200" dirty="0"/>
           </a:p>
@@ -8417,8 +8417,8 @@
         </p:nvSpPr>
         <p:spPr>
           <a:xfrm>
-            <a:off x="548640" y="2468880"/>
-            <a:ext cx="1463040" cy="320040"/>
+            <a:off x="457200" y="2468880"/>
+            <a:ext cx="1645920" cy="320040"/>
           </a:xfrm>
           <a:prstGeom prst="rect">
             <a:avLst/>
@@ -8434,7 +8434,7 @@
               <a:buNone/>
             </a:pPr>
             <a:r>
-              <a:rPr lang="en-US" sz="1400" b="1" dirty="0">
+              <a:rPr lang="en-US" sz="1250" b="1" dirty="0">
                 <a:solidFill>
                   <a:srgbClr val="FFFFFF"/>
                 </a:solidFill>
@@ -8442,9 +8442,9 @@
                 <a:ea typeface="Calibri" pitchFamily="34" charset="-122"/>
                 <a:cs typeface="Calibri" pitchFamily="34" charset="-120"/>
               </a:rPr>
-              <a:t>1. Izvor</a:t>
-            </a:r>
-            <a:endParaRPr lang="en-US" sz="1400" dirty="0"/>
+              <a:t>1. Извор</a:t>
+            </a:r>
+            <a:endParaRPr lang="en-US" sz="1250" dirty="0"/>
           </a:p>
         </p:txBody>
       </p:sp>
@@ -8481,7 +8481,7 @@
                 <a:ea typeface="Calibri" pitchFamily="34" charset="-122"/>
                 <a:cs typeface="Calibri" pitchFamily="34" charset="-120"/>
               </a:rPr>
-              <a:t>Ugalj, gas, voda, vetar ili sunce</a:t>
+              <a:t>Угаљ, гас, вода, ветар или сунце</a:t>
             </a:r>
             <a:endParaRPr lang="en-US" sz="1050" dirty="0"/>
           </a:p>
@@ -8569,8 +8569,8 @@
         </p:nvSpPr>
         <p:spPr>
           <a:xfrm>
-            <a:off x="2194560" y="2468880"/>
-            <a:ext cx="1463040" cy="320040"/>
+            <a:off x="2103120" y="2468880"/>
+            <a:ext cx="1645920" cy="320040"/>
           </a:xfrm>
           <a:prstGeom prst="rect">
             <a:avLst/>
@@ -8586,7 +8586,7 @@
               <a:buNone/>
             </a:pPr>
             <a:r>
-              <a:rPr lang="en-US" sz="1400" b="1" dirty="0">
+              <a:rPr lang="en-US" sz="1250" b="1" dirty="0">
                 <a:solidFill>
                   <a:srgbClr val="FFFFFF"/>
                 </a:solidFill>
@@ -8594,9 +8594,9 @@
                 <a:ea typeface="Calibri" pitchFamily="34" charset="-122"/>
                 <a:cs typeface="Calibri" pitchFamily="34" charset="-120"/>
               </a:rPr>
-              <a:t>2. Elektrana</a:t>
-            </a:r>
-            <a:endParaRPr lang="en-US" sz="1400" dirty="0"/>
+              <a:t>2. Електрана</a:t>
+            </a:r>
+            <a:endParaRPr lang="en-US" sz="1250" dirty="0"/>
           </a:p>
         </p:txBody>
       </p:sp>
@@ -8633,7 +8633,7 @@
                 <a:ea typeface="Calibri" pitchFamily="34" charset="-122"/>
                 <a:cs typeface="Calibri" pitchFamily="34" charset="-120"/>
               </a:rPr>
-              <a:t>Turbina i generator pretvaraju energiju u struju</a:t>
+              <a:t>Турбина и генератор претварају енергију у струју</a:t>
             </a:r>
             <a:endParaRPr lang="en-US" sz="1050" dirty="0"/>
           </a:p>
@@ -8721,8 +8721,8 @@
         </p:nvSpPr>
         <p:spPr>
           <a:xfrm>
-            <a:off x="3840480" y="2468880"/>
-            <a:ext cx="1463040" cy="320040"/>
+            <a:off x="3749040" y="2468880"/>
+            <a:ext cx="1645920" cy="320040"/>
           </a:xfrm>
           <a:prstGeom prst="rect">
             <a:avLst/>
@@ -8738,7 +8738,7 @@
               <a:buNone/>
             </a:pPr>
             <a:r>
-              <a:rPr lang="en-US" sz="1400" b="1" dirty="0">
+              <a:rPr lang="en-US" sz="1250" b="1" dirty="0">
                 <a:solidFill>
                   <a:srgbClr val="FFFFFF"/>
                 </a:solidFill>
@@ -8746,9 +8746,9 @@
                 <a:ea typeface="Calibri" pitchFamily="34" charset="-122"/>
                 <a:cs typeface="Calibri" pitchFamily="34" charset="-120"/>
               </a:rPr>
-              <a:t>3. Prenos</a:t>
-            </a:r>
-            <a:endParaRPr lang="en-US" sz="1400" dirty="0"/>
+              <a:t>3. Пренос</a:t>
+            </a:r>
+            <a:endParaRPr lang="en-US" sz="1250" dirty="0"/>
           </a:p>
         </p:txBody>
       </p:sp>
@@ -8785,7 +8785,7 @@
                 <a:ea typeface="Calibri" pitchFamily="34" charset="-122"/>
                 <a:cs typeface="Calibri" pitchFamily="34" charset="-120"/>
               </a:rPr>
-              <a:t>Dalekovodi visokog napona prenose struju stotinama km</a:t>
+              <a:t>Далеководи високог напона преносе струју стотинама км</a:t>
             </a:r>
             <a:endParaRPr lang="en-US" sz="1050" dirty="0"/>
           </a:p>
@@ -8873,8 +8873,8 @@
         </p:nvSpPr>
         <p:spPr>
           <a:xfrm>
-            <a:off x="5486400" y="2468880"/>
-            <a:ext cx="1463040" cy="320040"/>
+            <a:off x="5394960" y="2468880"/>
+            <a:ext cx="1645920" cy="320040"/>
           </a:xfrm>
           <a:prstGeom prst="rect">
             <a:avLst/>
@@ -8890,7 +8890,7 @@
               <a:buNone/>
             </a:pPr>
             <a:r>
-              <a:rPr lang="en-US" sz="1400" b="1" dirty="0">
+              <a:rPr lang="en-US" sz="1250" b="1" dirty="0">
                 <a:solidFill>
                   <a:srgbClr val="FFFFFF"/>
                 </a:solidFill>
@@ -8898,9 +8898,9 @@
                 <a:ea typeface="Calibri" pitchFamily="34" charset="-122"/>
                 <a:cs typeface="Calibri" pitchFamily="34" charset="-120"/>
               </a:rPr>
-              <a:t>4. Distribucija</a:t>
-            </a:r>
-            <a:endParaRPr lang="en-US" sz="1400" dirty="0"/>
+              <a:t>4. Дистрибуција</a:t>
+            </a:r>
+            <a:endParaRPr lang="en-US" sz="1250" dirty="0"/>
           </a:p>
         </p:txBody>
       </p:sp>
@@ -8937,7 +8937,7 @@
                 <a:ea typeface="Calibri" pitchFamily="34" charset="-122"/>
                 <a:cs typeface="Calibri" pitchFamily="34" charset="-120"/>
               </a:rPr>
-              <a:t>Trafostanice spuštaju napon do naših domova</a:t>
+              <a:t>Трафостанице спуштају напон до наших домова</a:t>
             </a:r>
             <a:endParaRPr lang="en-US" sz="1050" dirty="0"/>
           </a:p>
@@ -9000,8 +9000,8 @@
         </p:nvSpPr>
         <p:spPr>
           <a:xfrm>
-            <a:off x="7132320" y="2468880"/>
-            <a:ext cx="1463040" cy="320040"/>
+            <a:off x="7040880" y="2468880"/>
+            <a:ext cx="1645920" cy="320040"/>
           </a:xfrm>
           <a:prstGeom prst="rect">
             <a:avLst/>
@@ -9017,7 +9017,7 @@
               <a:buNone/>
             </a:pPr>
             <a:r>
-              <a:rPr lang="en-US" sz="1400" b="1" dirty="0">
+              <a:rPr lang="en-US" sz="1250" b="1" dirty="0">
                 <a:solidFill>
                   <a:srgbClr val="FFFFFF"/>
                 </a:solidFill>
@@ -9025,9 +9025,9 @@
                 <a:ea typeface="Calibri" pitchFamily="34" charset="-122"/>
                 <a:cs typeface="Calibri" pitchFamily="34" charset="-120"/>
               </a:rPr>
-              <a:t>5. Potrošnja</a:t>
-            </a:r>
-            <a:endParaRPr lang="en-US" sz="1400" dirty="0"/>
+              <a:t>5. Потрошња</a:t>
+            </a:r>
+            <a:endParaRPr lang="en-US" sz="1250" dirty="0"/>
           </a:p>
         </p:txBody>
       </p:sp>
@@ -9064,7 +9064,7 @@
                 <a:ea typeface="Calibri" pitchFamily="34" charset="-122"/>
                 <a:cs typeface="Calibri" pitchFamily="34" charset="-120"/>
               </a:rPr>
-              <a:t>Uređaji, svetlo, grejanje, industrija</a:t>
+              <a:t>Уређаји, светло, грејање, индустрија</a:t>
             </a:r>
             <a:endParaRPr lang="en-US" sz="1050" dirty="0"/>
           </a:p>
@@ -9137,7 +9137,7 @@
                 <a:ea typeface="Calibri" pitchFamily="34" charset="-122"/>
                 <a:cs typeface="Calibri" pitchFamily="34" charset="-120"/>
               </a:rPr>
-              <a:t>Zanimljivost: </a:t>
+              <a:t>Занимљивост: </a:t>
             </a:r>
             <a:pPr indent="0" marL="0">
               <a:buNone/>
@@ -9151,7 +9151,7 @@
                 <a:ea typeface="Calibri" pitchFamily="34" charset="-122"/>
                 <a:cs typeface="Calibri" pitchFamily="34" charset="-120"/>
               </a:rPr>
-              <a:t>na putu od elektrane do potrošača izgubi se 5–10% struje kao toplota u kablovima. U Srbiji su ti gubici i do 12%.</a:t>
+              <a:t>на путу од електране до потрошача изгуби се 5–10% струје као топлота у кабловима. У Србији су ти губици и до 12%.</a:t>
             </a:r>
             <a:endParaRPr lang="en-US" sz="1200" dirty="0"/>
           </a:p>
@@ -9261,7 +9261,7 @@
                 <a:ea typeface="Cambria" pitchFamily="34" charset="-122"/>
                 <a:cs typeface="Cambria" pitchFamily="34" charset="-120"/>
               </a:rPr>
-              <a:t>Svet troši sve više energije</a:t>
+              <a:t>Свет троши све више енергије</a:t>
             </a:r>
             <a:endParaRPr lang="en-US" sz="3200" dirty="0"/>
           </a:p>
@@ -9300,7 +9300,7 @@
                 <a:ea typeface="Calibri" pitchFamily="34" charset="-122"/>
                 <a:cs typeface="Calibri" pitchFamily="34" charset="-120"/>
               </a:rPr>
-              <a:t>Svetska potrošnja primarne energije (eksadžuli, EJ)</a:t>
+              <a:t>Светска потрошња примарне енергије (ексаџули, ЕЈ)</a:t>
             </a:r>
             <a:endParaRPr lang="en-US" sz="1300" dirty="0"/>
           </a:p>
@@ -9428,7 +9428,7 @@
                 <a:ea typeface="Calibri" pitchFamily="34" charset="-122"/>
                 <a:cs typeface="Calibri" pitchFamily="34" charset="-120"/>
               </a:rPr>
-              <a:t>porast potrošnje od 1990. godine</a:t>
+              <a:t>пораст потрошње од 1990. године</a:t>
             </a:r>
             <a:endParaRPr lang="en-US" sz="1200" dirty="0"/>
           </a:p>
@@ -9540,7 +9540,7 @@
                 <a:ea typeface="Calibri" pitchFamily="34" charset="-122"/>
                 <a:cs typeface="Calibri" pitchFamily="34" charset="-120"/>
               </a:rPr>
-              <a:t>jedini pad u modernoj istoriji — pandemija je zaustavila svet</a:t>
+              <a:t>једини пад у модерној историји — пандемија је зауставила свет</a:t>
             </a:r>
             <a:endParaRPr lang="en-US" sz="1200" dirty="0"/>
           </a:p>
@@ -9650,7 +9650,7 @@
                 <a:ea typeface="Cambria" pitchFamily="34" charset="-122"/>
                 <a:cs typeface="Cambria" pitchFamily="34" charset="-120"/>
               </a:rPr>
-              <a:t>Ko troši najviše energije?</a:t>
+              <a:t>Ко троши највише енергије?</a:t>
             </a:r>
             <a:endParaRPr lang="en-US" sz="3200" dirty="0"/>
           </a:p>
@@ -9689,7 +9689,7 @@
                 <a:ea typeface="Calibri" pitchFamily="34" charset="-122"/>
                 <a:cs typeface="Calibri" pitchFamily="34" charset="-120"/>
               </a:rPr>
-              <a:t>Udeo u svetskoj potrošnji energije, % (2023, približno)</a:t>
+              <a:t>Удео у светској потрошњи енергије, % (2023, приближно)</a:t>
             </a:r>
             <a:endParaRPr lang="en-US" sz="1300" dirty="0"/>
           </a:p>
@@ -9827,7 +9827,7 @@
                 <a:ea typeface="Calibri" pitchFamily="34" charset="-122"/>
                 <a:cs typeface="Calibri" pitchFamily="34" charset="-120"/>
               </a:rPr>
-              <a:t>Ali po stanovniku…</a:t>
+              <a:t>Али по становнику…</a:t>
             </a:r>
             <a:endParaRPr lang="en-US" sz="1400" dirty="0"/>
           </a:p>
@@ -9870,7 +9870,7 @@
                 <a:ea typeface="Calibri" pitchFamily="34" charset="-122"/>
                 <a:cs typeface="Calibri" pitchFamily="34" charset="-120"/>
               </a:rPr>
-              <a:t>Prosečan Amerikanac troši 2× više energije od Evropljanina i 3× više od Kineza.</a:t>
+              <a:t>Просечан Американац троши 2× више енергије од Европљанина и 3× више од Кинеза.</a:t>
             </a:r>
             <a:endParaRPr lang="en-US" sz="1150" dirty="0"/>
           </a:p>
@@ -9891,7 +9891,7 @@
                 <a:ea typeface="Calibri" pitchFamily="34" charset="-122"/>
                 <a:cs typeface="Calibri" pitchFamily="34" charset="-120"/>
               </a:rPr>
-              <a:t>Stanovnik Afrike troši 10× manje od stanovnika SAD.</a:t>
+              <a:t>Становник Африке троши 10× мање од становника САД.</a:t>
             </a:r>
             <a:endParaRPr lang="en-US" sz="1150" dirty="0"/>
           </a:p>
@@ -9912,7 +9912,7 @@
                 <a:ea typeface="Calibri" pitchFamily="34" charset="-122"/>
                 <a:cs typeface="Calibri" pitchFamily="34" charset="-120"/>
               </a:rPr>
-              <a:t>Oko 700 miliona ljudi u svetu i dalje nema pristup struji.</a:t>
+              <a:t>Око 700 милиона људи у свету и даље нема приступ струји.</a:t>
             </a:r>
             <a:endParaRPr lang="en-US" sz="1150" dirty="0"/>
           </a:p>
@@ -10022,7 +10022,7 @@
                 <a:ea typeface="Cambria" pitchFamily="34" charset="-122"/>
                 <a:cs typeface="Cambria" pitchFamily="34" charset="-120"/>
               </a:rPr>
-              <a:t>Na šta se energija troši?</a:t>
+              <a:t>На шта се енергија троши?</a:t>
             </a:r>
             <a:endParaRPr lang="en-US" sz="3200" dirty="0"/>
           </a:p>
@@ -10061,7 +10061,7 @@
                 <a:ea typeface="Calibri" pitchFamily="34" charset="-122"/>
                 <a:cs typeface="Calibri" pitchFamily="34" charset="-120"/>
               </a:rPr>
-              <a:t>Finalna potrošnja energije po sektorima, % (svet)</a:t>
+              <a:t>Финална потрошња енергије по секторима, % (свет)</a:t>
             </a:r>
             <a:endParaRPr lang="en-US" sz="1300" dirty="0"/>
           </a:p>
@@ -10222,7 +10222,7 @@
                 <a:ea typeface="Calibri" pitchFamily="34" charset="-122"/>
                 <a:cs typeface="Calibri" pitchFamily="34" charset="-120"/>
               </a:rPr>
-              <a:t>Industrija</a:t>
+              <a:t>Индустрија</a:t>
             </a:r>
             <a:endParaRPr lang="en-US" sz="1300" dirty="0"/>
           </a:p>
@@ -10261,7 +10261,7 @@
                 <a:ea typeface="Calibri" pitchFamily="34" charset="-122"/>
                 <a:cs typeface="Calibri" pitchFamily="34" charset="-120"/>
               </a:rPr>
-              <a:t>čelik, cement, hemija, hrana</a:t>
+              <a:t>челик, цемент, хемија, храна</a:t>
             </a:r>
             <a:endParaRPr lang="en-US" sz="1000" dirty="0"/>
           </a:p>
@@ -10422,7 +10422,7 @@
                 <a:ea typeface="Calibri" pitchFamily="34" charset="-122"/>
                 <a:cs typeface="Calibri" pitchFamily="34" charset="-120"/>
               </a:rPr>
-              <a:t>Saobraćaj</a:t>
+              <a:t>Саобраћај</a:t>
             </a:r>
             <a:endParaRPr lang="en-US" sz="1300" dirty="0"/>
           </a:p>
@@ -10461,7 +10461,7 @@
                 <a:ea typeface="Calibri" pitchFamily="34" charset="-122"/>
                 <a:cs typeface="Calibri" pitchFamily="34" charset="-120"/>
               </a:rPr>
-              <a:t>drumski saobraćaj čini ¾ toga</a:t>
+              <a:t>друмски саобраћај чини ¾ тога</a:t>
             </a:r>
             <a:endParaRPr lang="en-US" sz="1000" dirty="0"/>
           </a:p>
@@ -10622,7 +10622,7 @@
                 <a:ea typeface="Calibri" pitchFamily="34" charset="-122"/>
                 <a:cs typeface="Calibri" pitchFamily="34" charset="-120"/>
               </a:rPr>
-              <a:t>Domaćinstva</a:t>
+              <a:t>Домаћинства</a:t>
             </a:r>
             <a:endParaRPr lang="en-US" sz="1300" dirty="0"/>
           </a:p>
@@ -10661,7 +10661,7 @@
                 <a:ea typeface="Calibri" pitchFamily="34" charset="-122"/>
                 <a:cs typeface="Calibri" pitchFamily="34" charset="-120"/>
               </a:rPr>
-              <a:t>grejanje, kuvanje, uređaji</a:t>
+              <a:t>грејање, кување, уређаји</a:t>
             </a:r>
             <a:endParaRPr lang="en-US" sz="1000" dirty="0"/>
           </a:p>
@@ -10822,7 +10822,7 @@
                 <a:ea typeface="Calibri" pitchFamily="34" charset="-122"/>
                 <a:cs typeface="Calibri" pitchFamily="34" charset="-120"/>
               </a:rPr>
-              <a:t>Usluge i ostalo</a:t>
+              <a:t>Услуге и остало</a:t>
             </a:r>
             <a:endParaRPr lang="en-US" sz="1300" dirty="0"/>
           </a:p>
@@ -10861,7 +10861,7 @@
                 <a:ea typeface="Calibri" pitchFamily="34" charset="-122"/>
                 <a:cs typeface="Calibri" pitchFamily="34" charset="-120"/>
               </a:rPr>
-              <a:t>kancelarije, škole, poljoprivreda</a:t>
+              <a:t>канцеларије, школе, пољопривреда</a:t>
             </a:r>
             <a:endParaRPr lang="en-US" sz="1000" dirty="0"/>
           </a:p>
@@ -10983,7 +10983,7 @@
                 <a:ea typeface="Calibri" pitchFamily="34" charset="-122"/>
                 <a:cs typeface="Calibri" pitchFamily="34" charset="-120"/>
               </a:rPr>
-              <a:t>Skriveni potrošač: </a:t>
+              <a:t>Скривени потрошач: </a:t>
             </a:r>
             <a:pPr indent="0" marL="0">
               <a:buNone/>
@@ -10997,7 +10997,7 @@
                 <a:ea typeface="Calibri" pitchFamily="34" charset="-122"/>
                 <a:cs typeface="Calibri" pitchFamily="34" charset="-120"/>
               </a:rPr>
-              <a:t>grejanje i hlađenje prostora čine oko 50% energije koju koriste zgrade. Dobra izolacija štedi više nego bilo koji uređaj.</a:t>
+              <a:t>грејање и хлађење простора чине око 50% енергије коју користе зграде. Добра изолација штеди више него било који уређај.</a:t>
             </a:r>
             <a:endParaRPr lang="en-US" sz="1200" dirty="0"/>
           </a:p>
